--- a/docs/pitch-deck/Property_Inspection_AI_Submission_Xcore.pptx
+++ b/docs/pitch-deck/Property_Inspection_AI_Submission_Xcore.pptx
@@ -415,7 +415,7 @@
               </c14:invertSolidFillFmt>
             </c:ext>
             <c:ext xmlns:c16="http://schemas.microsoft.com/office/drawing/2014/chart" uri="{C3380CC4-5D6E-409C-BE32-E72D297353CC}">
-              <c16:uniqueId val="{00000000-2E72-497C-B236-139A3702FA19}"/>
+              <c16:uniqueId val="{00000000-9DBF-47BF-85E2-FE095F3FB268}"/>
             </c:ext>
           </c:extLst>
         </c:ser>
@@ -529,7 +529,7 @@
               </c14:invertSolidFillFmt>
             </c:ext>
             <c:ext xmlns:c16="http://schemas.microsoft.com/office/drawing/2014/chart" uri="{C3380CC4-5D6E-409C-BE32-E72D297353CC}">
-              <c16:uniqueId val="{00000001-2E72-497C-B236-139A3702FA19}"/>
+              <c16:uniqueId val="{00000001-9DBF-47BF-85E2-FE095F3FB268}"/>
             </c:ext>
           </c:extLst>
         </c:ser>
@@ -643,7 +643,7 @@
               </c14:invertSolidFillFmt>
             </c:ext>
             <c:ext xmlns:c16="http://schemas.microsoft.com/office/drawing/2014/chart" uri="{C3380CC4-5D6E-409C-BE32-E72D297353CC}">
-              <c16:uniqueId val="{00000002-2E72-497C-B236-139A3702FA19}"/>
+              <c16:uniqueId val="{00000002-9DBF-47BF-85E2-FE095F3FB268}"/>
             </c:ext>
           </c:extLst>
         </c:ser>
@@ -757,7 +757,7 @@
               </c14:invertSolidFillFmt>
             </c:ext>
             <c:ext xmlns:c16="http://schemas.microsoft.com/office/drawing/2014/chart" uri="{C3380CC4-5D6E-409C-BE32-E72D297353CC}">
-              <c16:uniqueId val="{00000003-2E72-497C-B236-139A3702FA19}"/>
+              <c16:uniqueId val="{00000003-9DBF-47BF-85E2-FE095F3FB268}"/>
             </c:ext>
           </c:extLst>
         </c:ser>
@@ -1425,7 +1425,7 @@
           <a:lstStyle/>
           <a:p>
             <a:r>
-              <a:t>Team Xcore, led by Thanveer Ahamed (Gen AI Lead), with Janitha Prathapa (Vision AI Lead) and Dinal Fernando (Solution Architect). BFSI track: Intelligent Risk, Fraud &amp; Financial Experiences.</a:t>
+              <a:t>Team Xcore, led by Thanveer Ahamed. BFSI track: Intelligent Risk, Fraud &amp; Financial Experiences.</a:t>
             </a:r>
           </a:p>
         </p:txBody>
@@ -7979,324 +7979,6 @@
           </a:p>
         </p:txBody>
       </p:sp>
-      <p:pic>
-        <p:nvPicPr>
-          <p:cNvPr id="59" name="Picture 58" descr="s02_54.png"/>
-          <p:cNvPicPr>
-            <a:picLocks noChangeAspect="1"/>
-          </p:cNvPicPr>
-          <p:nvPr/>
-        </p:nvPicPr>
-        <p:blipFill>
-          <a:blip r:embed="rId5"/>
-          <a:stretch>
-            <a:fillRect/>
-          </a:stretch>
-        </p:blipFill>
-        <p:spPr>
-          <a:xfrm>
-            <a:off x="6163055" y="3566160"/>
-            <a:ext cx="658368" cy="658368"/>
-          </a:xfrm>
-          <a:prstGeom prst="rect">
-            <a:avLst/>
-          </a:prstGeom>
-        </p:spPr>
-      </p:pic>
-      <p:sp>
-        <p:nvSpPr>
-          <p:cNvPr id="60" name="TextBox 59"/>
-          <p:cNvSpPr txBox="1"/>
-          <p:nvPr/>
-        </p:nvSpPr>
-        <p:spPr>
-          <a:xfrm>
-            <a:off x="5998464" y="4261104"/>
-            <a:ext cx="950976" cy="182880"/>
-          </a:xfrm>
-          <a:prstGeom prst="rect">
-            <a:avLst/>
-          </a:prstGeom>
-          <a:noFill/>
-        </p:spPr>
-        <p:txBody>
-          <a:bodyPr wrap="square" lIns="0" tIns="0" rIns="0" bIns="0" anchor="t">
-            <a:noAutofit/>
-          </a:bodyPr>
-          <a:lstStyle/>
-          <a:p>
-            <a:pPr algn="ctr">
-              <a:spcAft>
-                <a:spcPts val="200"/>
-              </a:spcAft>
-            </a:pPr>
-            <a:r>
-              <a:rPr sz="750" b="1" i="0">
-                <a:solidFill>
-                  <a:srgbClr val="202124"/>
-                </a:solidFill>
-                <a:latin typeface="Google Sans Flex"/>
-                <a:ea typeface="Google Sans Flex"/>
-                <a:cs typeface="Google Sans Flex"/>
-              </a:rPr>
-              <a:t>Thanveer Ahamed</a:t>
-            </a:r>
-          </a:p>
-        </p:txBody>
-      </p:sp>
-      <p:sp>
-        <p:nvSpPr>
-          <p:cNvPr id="61" name="TextBox 60"/>
-          <p:cNvSpPr txBox="1"/>
-          <p:nvPr/>
-        </p:nvSpPr>
-        <p:spPr>
-          <a:xfrm>
-            <a:off x="5998464" y="4425696"/>
-            <a:ext cx="950976" cy="292608"/>
-          </a:xfrm>
-          <a:prstGeom prst="rect">
-            <a:avLst/>
-          </a:prstGeom>
-          <a:noFill/>
-        </p:spPr>
-        <p:txBody>
-          <a:bodyPr wrap="square" lIns="0" tIns="0" rIns="0" bIns="0" anchor="t">
-            <a:noAutofit/>
-          </a:bodyPr>
-          <a:lstStyle/>
-          <a:p>
-            <a:pPr algn="ctr">
-              <a:spcAft>
-                <a:spcPts val="200"/>
-              </a:spcAft>
-            </a:pPr>
-            <a:r>
-              <a:rPr sz="650" b="0" i="0">
-                <a:solidFill>
-                  <a:srgbClr val="5F6368"/>
-                </a:solidFill>
-                <a:latin typeface="Google Sans Flex"/>
-                <a:ea typeface="Google Sans Flex"/>
-                <a:cs typeface="Google Sans Flex"/>
-              </a:rPr>
-              <a:t>Leader · Gen AI</a:t>
-            </a:r>
-          </a:p>
-        </p:txBody>
-      </p:sp>
-      <p:pic>
-        <p:nvPicPr>
-          <p:cNvPr id="62" name="Picture 61" descr="s02_60.png"/>
-          <p:cNvPicPr>
-            <a:picLocks noChangeAspect="1"/>
-          </p:cNvPicPr>
-          <p:nvPr/>
-        </p:nvPicPr>
-        <p:blipFill>
-          <a:blip r:embed="rId6"/>
-          <a:stretch>
-            <a:fillRect/>
-          </a:stretch>
-        </p:blipFill>
-        <p:spPr>
-          <a:xfrm>
-            <a:off x="7114031" y="3566160"/>
-            <a:ext cx="658368" cy="658368"/>
-          </a:xfrm>
-          <a:prstGeom prst="rect">
-            <a:avLst/>
-          </a:prstGeom>
-        </p:spPr>
-      </p:pic>
-      <p:sp>
-        <p:nvSpPr>
-          <p:cNvPr id="63" name="TextBox 62"/>
-          <p:cNvSpPr txBox="1"/>
-          <p:nvPr/>
-        </p:nvSpPr>
-        <p:spPr>
-          <a:xfrm>
-            <a:off x="6949440" y="4261104"/>
-            <a:ext cx="950976" cy="182880"/>
-          </a:xfrm>
-          <a:prstGeom prst="rect">
-            <a:avLst/>
-          </a:prstGeom>
-          <a:noFill/>
-        </p:spPr>
-        <p:txBody>
-          <a:bodyPr wrap="square" lIns="0" tIns="0" rIns="0" bIns="0" anchor="t">
-            <a:noAutofit/>
-          </a:bodyPr>
-          <a:lstStyle/>
-          <a:p>
-            <a:pPr algn="ctr">
-              <a:spcAft>
-                <a:spcPts val="200"/>
-              </a:spcAft>
-            </a:pPr>
-            <a:r>
-              <a:rPr sz="750" b="1" i="0">
-                <a:solidFill>
-                  <a:srgbClr val="202124"/>
-                </a:solidFill>
-                <a:latin typeface="Google Sans Flex"/>
-                <a:ea typeface="Google Sans Flex"/>
-                <a:cs typeface="Google Sans Flex"/>
-              </a:rPr>
-              <a:t>Janitha Prathapa</a:t>
-            </a:r>
-          </a:p>
-        </p:txBody>
-      </p:sp>
-      <p:sp>
-        <p:nvSpPr>
-          <p:cNvPr id="64" name="TextBox 63"/>
-          <p:cNvSpPr txBox="1"/>
-          <p:nvPr/>
-        </p:nvSpPr>
-        <p:spPr>
-          <a:xfrm>
-            <a:off x="6949440" y="4425696"/>
-            <a:ext cx="950976" cy="292608"/>
-          </a:xfrm>
-          <a:prstGeom prst="rect">
-            <a:avLst/>
-          </a:prstGeom>
-          <a:noFill/>
-        </p:spPr>
-        <p:txBody>
-          <a:bodyPr wrap="square" lIns="0" tIns="0" rIns="0" bIns="0" anchor="t">
-            <a:noAutofit/>
-          </a:bodyPr>
-          <a:lstStyle/>
-          <a:p>
-            <a:pPr algn="ctr">
-              <a:spcAft>
-                <a:spcPts val="200"/>
-              </a:spcAft>
-            </a:pPr>
-            <a:r>
-              <a:rPr sz="650" b="0" i="0">
-                <a:solidFill>
-                  <a:srgbClr val="5F6368"/>
-                </a:solidFill>
-                <a:latin typeface="Google Sans Flex"/>
-                <a:ea typeface="Google Sans Flex"/>
-                <a:cs typeface="Google Sans Flex"/>
-              </a:rPr>
-              <a:t>Vision AI Lead</a:t>
-            </a:r>
-          </a:p>
-        </p:txBody>
-      </p:sp>
-      <p:pic>
-        <p:nvPicPr>
-          <p:cNvPr id="65" name="Picture 64" descr="s02_66.png"/>
-          <p:cNvPicPr>
-            <a:picLocks noChangeAspect="1"/>
-          </p:cNvPicPr>
-          <p:nvPr/>
-        </p:nvPicPr>
-        <p:blipFill>
-          <a:blip r:embed="rId7"/>
-          <a:stretch>
-            <a:fillRect/>
-          </a:stretch>
-        </p:blipFill>
-        <p:spPr>
-          <a:xfrm>
-            <a:off x="8065008" y="3566160"/>
-            <a:ext cx="658368" cy="658368"/>
-          </a:xfrm>
-          <a:prstGeom prst="rect">
-            <a:avLst/>
-          </a:prstGeom>
-        </p:spPr>
-      </p:pic>
-      <p:sp>
-        <p:nvSpPr>
-          <p:cNvPr id="66" name="TextBox 65"/>
-          <p:cNvSpPr txBox="1"/>
-          <p:nvPr/>
-        </p:nvSpPr>
-        <p:spPr>
-          <a:xfrm>
-            <a:off x="7900416" y="4261104"/>
-            <a:ext cx="950976" cy="182880"/>
-          </a:xfrm>
-          <a:prstGeom prst="rect">
-            <a:avLst/>
-          </a:prstGeom>
-          <a:noFill/>
-        </p:spPr>
-        <p:txBody>
-          <a:bodyPr wrap="square" lIns="0" tIns="0" rIns="0" bIns="0" anchor="t">
-            <a:noAutofit/>
-          </a:bodyPr>
-          <a:lstStyle/>
-          <a:p>
-            <a:pPr algn="ctr">
-              <a:spcAft>
-                <a:spcPts val="200"/>
-              </a:spcAft>
-            </a:pPr>
-            <a:r>
-              <a:rPr sz="750" b="1" i="0">
-                <a:solidFill>
-                  <a:srgbClr val="202124"/>
-                </a:solidFill>
-                <a:latin typeface="Google Sans Flex"/>
-                <a:ea typeface="Google Sans Flex"/>
-                <a:cs typeface="Google Sans Flex"/>
-              </a:rPr>
-              <a:t>Dinal Fernando</a:t>
-            </a:r>
-          </a:p>
-        </p:txBody>
-      </p:sp>
-      <p:sp>
-        <p:nvSpPr>
-          <p:cNvPr id="67" name="TextBox 66"/>
-          <p:cNvSpPr txBox="1"/>
-          <p:nvPr/>
-        </p:nvSpPr>
-        <p:spPr>
-          <a:xfrm>
-            <a:off x="7900416" y="4425696"/>
-            <a:ext cx="950976" cy="292608"/>
-          </a:xfrm>
-          <a:prstGeom prst="rect">
-            <a:avLst/>
-          </a:prstGeom>
-          <a:noFill/>
-        </p:spPr>
-        <p:txBody>
-          <a:bodyPr wrap="square" lIns="0" tIns="0" rIns="0" bIns="0" anchor="t">
-            <a:noAutofit/>
-          </a:bodyPr>
-          <a:lstStyle/>
-          <a:p>
-            <a:pPr algn="ctr">
-              <a:spcAft>
-                <a:spcPts val="200"/>
-              </a:spcAft>
-            </a:pPr>
-            <a:r>
-              <a:rPr sz="650" b="0" i="0">
-                <a:solidFill>
-                  <a:srgbClr val="5F6368"/>
-                </a:solidFill>
-                <a:latin typeface="Google Sans Flex"/>
-                <a:ea typeface="Google Sans Flex"/>
-                <a:cs typeface="Google Sans Flex"/>
-              </a:rPr>
-              <a:t>Solution Architect</a:t>
-            </a:r>
-          </a:p>
-        </p:txBody>
-      </p:sp>
     </p:spTree>
   </p:cSld>
   <p:clrMapOvr>
@@ -13131,7 +12813,7 @@
                 <a:ea typeface="Google Sans Flex"/>
                 <a:cs typeface="Google Sans Flex"/>
               </a:rPr>
-              <a:t>Responsible AI, go-to-market and the team behind it</a:t>
+              <a:t>Responsible AI and the go-to-market plan</a:t>
             </a:r>
           </a:p>
         </p:txBody>
@@ -14790,7 +14472,7 @@
         </p:nvSpPr>
         <p:spPr>
           <a:xfrm>
-            <a:off x="347472" y="3840480"/>
+            <a:off x="347472" y="4114800"/>
             <a:ext cx="8449056" cy="457200"/>
           </a:xfrm>
           <a:prstGeom prst="roundRect">
@@ -14841,80 +14523,6 @@
                 <a:cs typeface="Google Sans Flex"/>
               </a:rPr>
               <a:t>“Every lender and insurer already asks for photos. We replace them with a short phone video that is trustworthy, explainable and ready for a decision.”</a:t>
-            </a:r>
-          </a:p>
-        </p:txBody>
-      </p:sp>
-      <p:sp>
-        <p:nvSpPr>
-          <p:cNvPr id="206" name="Rounded Rectangle 205"/>
-          <p:cNvSpPr/>
-          <p:nvPr/>
-        </p:nvSpPr>
-        <p:spPr>
-          <a:xfrm>
-            <a:off x="347472" y="4389120"/>
-            <a:ext cx="8449056" cy="502920"/>
-          </a:xfrm>
-          <a:prstGeom prst="roundRect">
-            <a:avLst>
-              <a:gd name="adj" fmla="val 10909"/>
-            </a:avLst>
-          </a:prstGeom>
-          <a:solidFill>
-            <a:srgbClr val="E8F0FE"/>
-          </a:solidFill>
-          <a:ln>
-            <a:noFill/>
-          </a:ln>
-          <a:effectLst/>
-        </p:spPr>
-        <p:style>
-          <a:lnRef idx="1">
-            <a:schemeClr val="accent1"/>
-          </a:lnRef>
-          <a:fillRef idx="3">
-            <a:schemeClr val="accent1"/>
-          </a:fillRef>
-          <a:effectRef idx="2">
-            <a:schemeClr val="accent1"/>
-          </a:effectRef>
-          <a:fontRef idx="minor">
-            <a:schemeClr val="lt1"/>
-          </a:fontRef>
-        </p:style>
-        <p:txBody>
-          <a:bodyPr wrap="square" tIns="73152" bIns="73152" rtlCol="0" anchor="ctr">
-            <a:noAutofit/>
-          </a:bodyPr>
-          <a:lstStyle/>
-          <a:p>
-            <a:pPr algn="l">
-              <a:spcAft>
-                <a:spcPts val="200"/>
-              </a:spcAft>
-            </a:pPr>
-            <a:r>
-              <a:rPr sz="700" b="1" i="0">
-                <a:solidFill>
-                  <a:srgbClr val="202124"/>
-                </a:solidFill>
-                <a:latin typeface="Google Sans Flex"/>
-                <a:ea typeface="Google Sans Flex"/>
-                <a:cs typeface="Google Sans Flex"/>
-              </a:rPr>
-              <a:t>Team Xcore: </a:t>
-            </a:r>
-            <a:r>
-              <a:rPr sz="700" b="0" i="0">
-                <a:solidFill>
-                  <a:srgbClr val="202124"/>
-                </a:solidFill>
-                <a:latin typeface="Google Sans Flex"/>
-                <a:ea typeface="Google Sans Flex"/>
-                <a:cs typeface="Google Sans Flex"/>
-              </a:rPr>
-              <a:t>Thanveer Ahamed (Team Leader, Gen AI: Gemini &amp; Gemma reasoning, verification, underwriting assistant) · Janitha Prathapa (Vision AI: defect detection, Depth Anything 3, SLAM, 3D, coverage map) · Dinal Fernando (Solution Architect: Cloud Run, Vertex AI, BigQuery, Pub/Sub, deployment)</a:t>
             </a:r>
           </a:p>
         </p:txBody>

--- a/docs/pitch-deck/Property_Inspection_AI_Submission_Xcore.pptx
+++ b/docs/pitch-deck/Property_Inspection_AI_Submission_Xcore.pptx
@@ -2652,7 +2652,7 @@
           <a:lstStyle/>
           <a:p>
             <a:r>
-              <a:t>A single Cloud Run service with an L4 GPU runs the API, web UI, local models and 3D engine. Gemini on Vertex AI provides reasoning. Results go to Cloud Storage, BigQuery and Pub/Sub. One-script deploy, no keys.</a:t>
+              <a:t>Architecture: one container image, two Cloud Run resources. A CPU-only Cloud Run service serves the web UI and API, accepts uploads, dispatches jobs and shows progress. A Cloud Run Job with one NVIDIA L4 processes each uploaded video: Depth Anything 3 and OpenCV SLAM for the 3D map and coverage, LocateAnything and Gemma 4 for defect detection and verification, Gemini for scene, labels and summary. The GPU is billed only while a video is processing. A Cloud Storage bucket mounted on both holds uploads, job status and results. Gemini 3.8 Flash is called through the Gemini API with the key in Secret Manager: no Vertex AI, BigQuery or Pub/Sub. Deployment is one script through Cloud Build with a least-privilege service account. The diagram still shows the earlier single-service layout; the caption gives the deployed one.</a:t>
             </a:r>
           </a:p>
         </p:txBody>
@@ -10892,7 +10892,7 @@
                 <a:ea typeface="Google Sans Flex"/>
                 <a:cs typeface="Google Sans Flex"/>
               </a:rPr>
-              <a:t>Cloud Run, BigQuery, Pub/Sub</a:t>
+              <a:t>Cloud Run service + GPU Job</a:t>
             </a:r>
           </a:p>
         </p:txBody>
@@ -11961,7 +11961,7 @@
                 <a:ea typeface="Google Sans Flex"/>
                 <a:cs typeface="Google Sans Flex"/>
               </a:rPr>
-              <a:t>Gemini, Cloud Run + L4, BigQuery, Pub/Sub</a:t>
+              <a:t>Gemini API, Cloud Run service + L4 Job</a:t>
             </a:r>
           </a:p>
         </p:txBody>
@@ -13415,7 +13415,7 @@
                 <a:ea typeface="Google Sans Flex"/>
                 <a:cs typeface="Google Sans Flex"/>
               </a:rPr>
-              <a:t>Raw outputs archived; each inspection a BigQuery record; versioned config.</a:t>
+              <a:t>Raw outputs archived; each inspection a stored JSON record; versioned config.</a:t>
             </a:r>
           </a:p>
         </p:txBody>
@@ -13789,7 +13789,7 @@
                 <a:ea typeface="Google Sans Flex"/>
                 <a:cs typeface="Google Sans Flex"/>
               </a:rPr>
-              <a:t>Service account, no API keys in files, data stays in the client's project.</a:t>
+              <a:t>Secret Manager for the Gemini key; data stays in the client's project.</a:t>
             </a:r>
           </a:p>
         </p:txBody>
@@ -14816,13 +14816,13 @@
             <a:r>
               <a:rPr sz="1300" b="1" i="0">
                 <a:solidFill>
-                  <a:srgbClr val="D93025"/>
-                </a:solidFill>
-                <a:latin typeface="Google Sans Flex"/>
-                <a:ea typeface="Google Sans Flex"/>
-                <a:cs typeface="Google Sans Flex"/>
-              </a:rPr>
-              <a:t>[paste link here]</a:t>
+                  <a:srgbClr val="1A73E8"/>
+                </a:solidFill>
+                <a:latin typeface="Google Sans Flex"/>
+                <a:ea typeface="Google Sans Flex"/>
+                <a:cs typeface="Google Sans Flex"/>
+              </a:rPr>
+              <a:t>property-inspection-ai-77055350047.us-central1.run.app</a:t>
             </a:r>
             <a:endParaRPr>
               <a:latin typeface="Google Sans Flex Medium"/>
@@ -17535,7 +17535,7 @@
                           <a:ea typeface="Google Sans Flex"/>
                           <a:cs typeface="Google Sans Flex"/>
                         </a:rPr>
-                        <a:t>Grade, perils, cost, valuation, premium; BigQuery + Pub/Sub</a:t>
+                        <a:t>Grade, perils, cost, valuation, premium; JSON via REST API</a:t>
                       </a:r>
                     </a:p>
                   </a:txBody>
@@ -18627,7 +18627,7 @@
                 <a:ea typeface="Google Sans Flex"/>
                 <a:cs typeface="Google Sans Flex"/>
               </a:rPr>
-              <a:t> Lending, underwriting, claims, inspectors and owners share one BigQuery / Pub/Sub record.</a:t>
+              <a:t> Lending, underwriting, claims, inspectors and owners share one JSON record behind a REST API.</a:t>
             </a:r>
           </a:p>
           <a:p>
@@ -18645,7 +18645,7 @@
                 <a:ea typeface="Google Sans Flex"/>
                 <a:cs typeface="Google Sans Flex"/>
               </a:rPr>
-              <a:t>About $1 per video.</a:t>
+              <a:t>Under $1 per video.</a:t>
             </a:r>
             <a:r>
               <a:rPr sz="850" b="0" i="0">
@@ -18656,7 +18656,7 @@
                 <a:ea typeface="Google Sans Flex"/>
                 <a:cs typeface="Google Sans Flex"/>
               </a:rPr>
-              <a:t> ≈ $0.35 of Gemini per walkthrough; one-command Cloud Run deploy that scales to zero.</a:t>
+              <a:t> ≈ $0.50 of L4 time + ≈ $0.35 of Gemini per walkthrough; the GPU Job runs only per video.</a:t>
             </a:r>
           </a:p>
         </p:txBody>
@@ -22789,7 +22789,7 @@
                 <a:ea typeface="Google Sans Flex"/>
                 <a:cs typeface="Google Sans Flex"/>
               </a:rPr>
-              <a:t>Report, Gemini Q&amp;A, BigQuery row and Pub/Sub event to core systems.</a:t>
+              <a:t>Report, Gemini Q&amp;A and a JSON record via the REST API to core systems.</a:t>
             </a:r>
           </a:p>
         </p:txBody>
@@ -25695,7 +25695,7 @@
                 <a:ea typeface="Google Sans Flex"/>
                 <a:cs typeface="Google Sans Flex"/>
               </a:rPr>
-              <a:t>One Cloud Run service, powered by Gemini on Vertex AI</a:t>
+              <a:t>Cloud Run web service + L4 GPU Job, powered by Gemini</a:t>
             </a:r>
           </a:p>
         </p:txBody>
@@ -25724,6 +25724,47 @@
           </a:prstGeom>
         </p:spPr>
       </p:pic>
+      <p:sp>
+        <p:nvSpPr>
+          <p:cNvPr id="9001" name="Architecture caption"/>
+          <p:cNvSpPr txBox="1"/>
+          <p:nvPr/>
+        </p:nvSpPr>
+        <p:spPr>
+          <a:xfrm>
+            <a:off x="347472" y="4800600"/>
+            <a:ext cx="8449056" cy="256032"/>
+          </a:xfrm>
+          <a:prstGeom prst="rect">
+            <a:avLst/>
+          </a:prstGeom>
+          <a:noFill/>
+        </p:spPr>
+        <p:txBody>
+          <a:bodyPr wrap="square" lIns="0" tIns="0" rIns="0" bIns="0" anchor="t">
+            <a:noAutofit/>
+          </a:bodyPr>
+          <a:lstStyle/>
+          <a:p>
+            <a:pPr algn="l">
+              <a:spcAft>
+                <a:spcPts val="200"/>
+              </a:spcAft>
+            </a:pPr>
+            <a:r>
+              <a:rPr sz="700" b="0" i="1">
+                <a:solidFill>
+                  <a:srgbClr val="5F6368"/>
+                </a:solidFill>
+                <a:latin typeface="Google Sans Flex"/>
+                <a:ea typeface="Google Sans Flex"/>
+                <a:cs typeface="Google Sans Flex"/>
+              </a:rPr>
+              <a:t>Deployed layout (v1.0.0): web UI + API on a CPU-only Cloud Run service; 3D, coverage and AI inspection on a Cloud Run Job with one NVIDIA L4 per video; Cloud Storage bucket mounted on both; Gemini 3.8 Flash via the Gemini API (key in Secret Manager). BigQuery and Pub/Sub are not used.</a:t>
+            </a:r>
+          </a:p>
+        </p:txBody>
+      </p:sp>
     </p:spTree>
   </p:cSld>
   <p:clrMapOvr>
@@ -26119,7 +26160,7 @@
                 <a:ea typeface="Google Sans Flex"/>
                 <a:cs typeface="Google Sans Flex"/>
               </a:rPr>
-              <a:t>Gemini on Vertex AI</a:t>
+              <a:t>Gemini 3.8 Flash</a:t>
             </a:r>
           </a:p>
         </p:txBody>
@@ -26160,7 +26201,7 @@
                 <a:ea typeface="Google Sans Flex"/>
                 <a:cs typeface="Google Sans Flex"/>
               </a:rPr>
-              <a:t>Scene, authenticity, analysis, grounded Q&amp;A, 3D object names</a:t>
+              <a:t>Gemini API: scene, authenticity, analysis, grounded Q&amp;A, 3D object names</a:t>
             </a:r>
           </a:p>
         </p:txBody>
@@ -26493,7 +26534,7 @@
                 <a:ea typeface="Google Sans Flex"/>
                 <a:cs typeface="Google Sans Flex"/>
               </a:rPr>
-              <a:t>Cloud Run + NVIDIA L4</a:t>
+              <a:t>Cloud Run + L4 GPU Job</a:t>
             </a:r>
           </a:p>
         </p:txBody>
@@ -26534,7 +26575,7 @@
                 <a:ea typeface="Google Sans Flex"/>
                 <a:cs typeface="Google Sans Flex"/>
               </a:rPr>
-              <a:t>The whole app in one container; scales to zero</a:t>
+              <a:t>CPU web service + one L4 Job per video; both scale to zero</a:t>
             </a:r>
           </a:p>
         </p:txBody>
@@ -26721,7 +26762,7 @@
                 <a:ea typeface="Google Sans Flex"/>
                 <a:cs typeface="Google Sans Flex"/>
               </a:rPr>
-              <a:t>FUSE-mounted data: uploads, reports, 3D models</a:t>
+              <a:t>Bucket mounted on both: uploads, job status, results</a:t>
             </a:r>
           </a:p>
         </p:txBody>
@@ -26867,7 +26908,7 @@
                 <a:ea typeface="Google Sans Flex"/>
                 <a:cs typeface="Google Sans Flex"/>
               </a:rPr>
-              <a:t>BigQuery</a:t>
+              <a:t>Secret Manager</a:t>
             </a:r>
           </a:p>
         </p:txBody>
@@ -26908,7 +26949,7 @@
                 <a:ea typeface="Google Sans Flex"/>
                 <a:cs typeface="Google Sans Flex"/>
               </a:rPr>
-              <a:t>One row per inspection: grade, decision, perils, flags, coverage</a:t>
+              <a:t>Gemini API key injected at runtime; none in the image</a:t>
             </a:r>
           </a:p>
         </p:txBody>
@@ -27054,7 +27095,7 @@
                 <a:ea typeface="Google Sans Flex"/>
                 <a:cs typeface="Google Sans Flex"/>
               </a:rPr>
-              <a:t>Pub/Sub</a:t>
+              <a:t>Cloud Build</a:t>
             </a:r>
           </a:p>
         </p:txBody>
@@ -27095,7 +27136,7 @@
                 <a:ea typeface="Google Sans Flex"/>
                 <a:cs typeface="Google Sans Flex"/>
               </a:rPr>
-              <a:t>Event-driven hand-off to underwriting and claims</a:t>
+              <a:t>Builds the ~12 GB image; weights fetched inside the build</a:t>
             </a:r>
           </a:p>
         </p:txBody>
@@ -27241,7 +27282,7 @@
                 <a:ea typeface="Google Sans Flex"/>
                 <a:cs typeface="Google Sans Flex"/>
               </a:rPr>
-              <a:t>Cloud Build + Artifact Registry</a:t>
+              <a:t>Artifact Registry</a:t>
             </a:r>
           </a:p>
         </p:txBody>
@@ -27282,7 +27323,7 @@
                 <a:ea typeface="Google Sans Flex"/>
                 <a:cs typeface="Google Sans Flex"/>
               </a:rPr>
-              <a:t>Reproducible container build with baked-in models</a:t>
+              <a:t>One image with baked-in models for the service and the Job</a:t>
             </a:r>
           </a:p>
         </p:txBody>
@@ -27469,7 +27510,7 @@
                 <a:ea typeface="Google Sans Flex"/>
                 <a:cs typeface="Google Sans Flex"/>
               </a:rPr>
-              <a:t>Least privilege, no keys in production</a:t>
+              <a:t>Least-privilege runtime account; no keys in files</a:t>
             </a:r>
           </a:p>
         </p:txBody>
@@ -28365,7 +28406,7 @@
                 <a:ea typeface="Google Sans Flex"/>
                 <a:cs typeface="Google Sans Flex"/>
               </a:rPr>
-              <a:t>Gemini does reasoning, authenticity and explanation; open models on the Cloud Run GPU do high-volume boxing and verification cheaply; deterministic rules keep decisions auditable. Data stays in the client's own Google Cloud project, and BigQuery + Pub/Sub plug straight into lending, underwriting and claims systems.</a:t>
+              <a:t>Gemini does reasoning, authenticity and explanation; open models on the Cloud Run GPU Job do high-volume boxing and verification cheaply; deterministic rules keep decisions auditable. Data stays in the client's own Google Cloud project, and the JSON record and REST API plug straight into lending, underwriting and claims systems.</a:t>
             </a:r>
           </a:p>
         </p:txBody>
@@ -28779,7 +28820,7 @@
                           <a:ea typeface="Google Sans Flex"/>
                           <a:cs typeface="Google Sans Flex"/>
                         </a:rPr>
-                        <a:t>Gemini calls (Vertex AI)</a:t>
+                        <a:t>Gemini calls (Gemini API)</a:t>
                       </a:r>
                     </a:p>
                   </a:txBody>
@@ -28873,7 +28914,7 @@
                           <a:ea typeface="Google Sans Flex"/>
                           <a:cs typeface="Google Sans Flex"/>
                         </a:rPr>
-                        <a:t>NVIDIA L4 GPU on Cloud Run</a:t>
+                        <a:t>NVIDIA L4 on a Cloud Run Job</a:t>
                       </a:r>
                     </a:p>
                   </a:txBody>
@@ -28902,7 +28943,7 @@
                           <a:ea typeface="Google Sans Flex"/>
                           <a:cs typeface="Google Sans Flex"/>
                         </a:rPr>
-                        <a:t>≈ $1.42 per hour (8 vCPU, 32 GiB)</a:t>
+                        <a:t>1× L4, 8 vCPU, 32 GiB; one run per video</a:t>
                       </a:r>
                     </a:p>
                   </a:txBody>
@@ -28931,7 +28972,7 @@
                           <a:ea typeface="Google Sans Flex"/>
                           <a:cs typeface="Google Sans Flex"/>
                         </a:rPr>
-                        <a:t>Scales to zero when idle</a:t>
+                        <a:t>≈ $0.50 per 20-min walkthrough</a:t>
                       </a:r>
                     </a:p>
                   </a:txBody>
@@ -28967,7 +29008,7 @@
                           <a:ea typeface="Google Sans Flex"/>
                           <a:cs typeface="Google Sans Flex"/>
                         </a:rPr>
-                        <a:t>Video inspection compute</a:t>
+                        <a:t>Video inspection, all-in</a:t>
                       </a:r>
                     </a:p>
                   </a:txBody>
@@ -28996,7 +29037,7 @@
                           <a:ea typeface="Google Sans Flex"/>
                           <a:cs typeface="Google Sans Flex"/>
                         </a:rPr>
-                        <a:t>10–35 min of GPU + Gemini</a:t>
+                        <a:t>L4 Job + Gemini calls</a:t>
                       </a:r>
                     </a:p>
                   </a:txBody>
@@ -29025,7 +29066,7 @@
                           <a:ea typeface="Google Sans Flex"/>
                           <a:cs typeface="Google Sans Flex"/>
                         </a:rPr>
-                        <a:t>≈ $1 Lite, ≈ $1.50 Advanced</a:t>
+                        <a:t>≈ $0.85 per walkthrough</a:t>
                       </a:r>
                     </a:p>
                   </a:txBody>
@@ -29061,7 +29102,7 @@
                           <a:ea typeface="Google Sans Flex"/>
                           <a:cs typeface="Google Sans Flex"/>
                         </a:rPr>
-                        <a:t>Two weeks of judging</a:t>
+                        <a:t>Web UI + API (Cloud Run)</a:t>
                       </a:r>
                     </a:p>
                   </a:txBody>
@@ -29090,7 +29131,7 @@
                           <a:ea typeface="Google Sans Flex"/>
                           <a:cs typeface="Google Sans Flex"/>
                         </a:rPr>
-                        <a:t>~40 visits, 20 videos</a:t>
+                        <a:t>1 vCPU, 2 GiB, scales to zero</a:t>
                       </a:r>
                     </a:p>
                   </a:txBody>
@@ -29119,7 +29160,7 @@
                           <a:ea typeface="Google Sans Flex"/>
                           <a:cs typeface="Google Sans Flex"/>
                         </a:rPr>
-                        <a:t>≈ $50–70 in total</a:t>
+                        <a:t>Within the free tier</a:t>
                       </a:r>
                     </a:p>
                   </a:txBody>
@@ -29155,7 +29196,7 @@
                           <a:ea typeface="Google Sans Flex"/>
                           <a:cs typeface="Google Sans Flex"/>
                         </a:rPr>
-                        <a:t>Storage, BigQuery, Pub/Sub</a:t>
+                        <a:t>Idle footprint</a:t>
                       </a:r>
                     </a:p>
                   </a:txBody>
@@ -29184,7 +29225,7 @@
                           <a:ea typeface="Google Sans Flex"/>
                           <a:cs typeface="Google Sans Flex"/>
                         </a:rPr>
-                        <a:t>Pay-per-use managed services</a:t>
+                        <a:t>12 GB image + data bucket</a:t>
                       </a:r>
                     </a:p>
                   </a:txBody>
@@ -29213,7 +29254,7 @@
                           <a:ea typeface="Google Sans Flex"/>
                           <a:cs typeface="Google Sans Flex"/>
                         </a:rPr>
-                        <a:t>Billed by usage</a:t>
+                        <a:t>≈ $1.20 per month</a:t>
                       </a:r>
                     </a:p>
                   </a:txBody>
@@ -29278,7 +29319,7 @@
                           <a:ea typeface="Google Sans Flex"/>
                           <a:cs typeface="Google Sans Flex"/>
                         </a:rPr>
-                        <a:t>One-command deploy.sh, Cloud Build</a:t>
+                        <a:t>One-command deploy, $30/mo budget alert</a:t>
                       </a:r>
                     </a:p>
                   </a:txBody>
@@ -29537,7 +29578,7 @@
                 <a:ea typeface="Google Sans Flex"/>
                 <a:cs typeface="Google Sans Flex"/>
               </a:rPr>
-              <a:t>&lt; $1</a:t>
+              <a:t>≈ $0.50</a:t>
             </a:r>
           </a:p>
         </p:txBody>
@@ -29578,7 +29619,7 @@
                 <a:ea typeface="Google Sans Flex"/>
                 <a:cs typeface="Google Sans Flex"/>
               </a:rPr>
-              <a:t>GPU compute per video</a:t>
+              <a:t>L4 GPU time per video</a:t>
             </a:r>
           </a:p>
         </p:txBody>
@@ -29706,7 +29747,7 @@
                 <a:ea typeface="Google Sans Flex"/>
                 <a:cs typeface="Google Sans Flex"/>
               </a:rPr>
-              <a:t>GPU cost when idle (scales to zero)</a:t>
+              <a:t>GPU cost when idle (Job runs per video)</a:t>
             </a:r>
           </a:p>
         </p:txBody>

--- a/docs/pitch-deck/Property_Inspection_AI_Submission_Xcore.pptx
+++ b/docs/pitch-deck/Property_Inspection_AI_Submission_Xcore.pptx
@@ -25702,7 +25702,7 @@
       </p:sp>
       <p:pic>
         <p:nvPicPr>
-          <p:cNvPr id="137" name="Architecture diagram" descr="Architecture: users upload a phone walkthrough to one Cloud Run service with an L4 GPU. Inside it the web app, 3D engine, coverage, AI inspection, risk engine and 3D report run in sequence. It calls Gemini 3.8 Flash on Vertex AI and writes to Cloud Storage, BigQuery and Pub/Sub, which notifies core systems."/>
+          <p:cNvPr id="137" name="Architecture diagram" descr="Architecture: users upload a phone walkthrough to a CPU-only Cloud Run service, which starts a Cloud Run Job with one NVIDIA L4 GPU per video. The Job runs the 3D engine, coverage, AI inspection and risk engine; the service shows the 3D report, Ask Gemini and a JSON API. Gemini 3.8 Flash is called through the Gemini API with the key from Secret Manager, a Cloud Storage bucket is mounted on both, and Cloud Build and Artifact Registry build the one image both use."/>
           <p:cNvPicPr>
             <a:picLocks noChangeAspect="1"/>
           </p:cNvPicPr>

--- a/docs/pitch-deck/Property_Inspection_AI_Submission_Xcore.pptx
+++ b/docs/pitch-deck/Property_Inspection_AI_Submission_Xcore.pptx
@@ -7979,6 +7979,201 @@
           </a:p>
         </p:txBody>
       </p:sp>
+      <p:pic>
+        <p:nvPicPr>
+          <p:cNvPr id="59" name="Picture 58" descr="s02_54.png"/>
+          <p:cNvPicPr>
+            <a:picLocks noChangeAspect="1"/>
+          </p:cNvPicPr>
+          <p:nvPr/>
+        </p:nvPicPr>
+        <p:blipFill>
+          <a:blip r:embed="rId5"/>
+          <a:stretch>
+            <a:fillRect/>
+          </a:stretch>
+        </p:blipFill>
+        <p:spPr>
+          <a:xfrm>
+            <a:off x="6163055" y="3566160"/>
+            <a:ext cx="658368" cy="658368"/>
+          </a:xfrm>
+          <a:prstGeom prst="rect">
+            <a:avLst/>
+          </a:prstGeom>
+        </p:spPr>
+      </p:pic>
+      <p:sp>
+        <p:nvSpPr>
+          <p:cNvPr id="60" name="TextBox 59"/>
+          <p:cNvSpPr txBox="1"/>
+          <p:nvPr/>
+        </p:nvSpPr>
+        <p:spPr>
+          <a:xfrm>
+            <a:off x="5998464" y="4261104"/>
+            <a:ext cx="950976" cy="182880"/>
+          </a:xfrm>
+          <a:prstGeom prst="rect">
+            <a:avLst/>
+          </a:prstGeom>
+          <a:noFill/>
+        </p:spPr>
+        <p:txBody>
+          <a:bodyPr wrap="square" lIns="0" tIns="0" rIns="0" bIns="0" anchor="t">
+            <a:noAutofit/>
+          </a:bodyPr>
+          <a:lstStyle/>
+          <a:p>
+            <a:pPr algn="ctr">
+              <a:spcAft>
+                <a:spcPts val="200"/>
+              </a:spcAft>
+            </a:pPr>
+            <a:r>
+              <a:rPr sz="750" b="1" i="0">
+                <a:solidFill>
+                  <a:srgbClr val="202124"/>
+                </a:solidFill>
+                <a:latin typeface="Google Sans Flex"/>
+                <a:ea typeface="Google Sans Flex"/>
+                <a:cs typeface="Google Sans Flex"/>
+              </a:rPr>
+              <a:t>Thanveer Ahamed</a:t>
+            </a:r>
+          </a:p>
+        </p:txBody>
+      </p:sp>
+      <p:pic>
+        <p:nvPicPr>
+          <p:cNvPr id="61" name="Picture 61" descr="s02_60.png"/>
+          <p:cNvPicPr>
+            <a:picLocks noChangeAspect="1"/>
+          </p:cNvPicPr>
+          <p:nvPr/>
+        </p:nvPicPr>
+        <p:blipFill>
+          <a:blip r:embed="rId6"/>
+          <a:stretch>
+            <a:fillRect/>
+          </a:stretch>
+        </p:blipFill>
+        <p:spPr>
+          <a:xfrm>
+            <a:off x="7114031" y="3566160"/>
+            <a:ext cx="658368" cy="658368"/>
+          </a:xfrm>
+          <a:prstGeom prst="rect">
+            <a:avLst/>
+          </a:prstGeom>
+        </p:spPr>
+      </p:pic>
+      <p:sp>
+        <p:nvSpPr>
+          <p:cNvPr id="62" name="TextBox 62"/>
+          <p:cNvSpPr txBox="1"/>
+          <p:nvPr/>
+        </p:nvSpPr>
+        <p:spPr>
+          <a:xfrm>
+            <a:off x="6949440" y="4261104"/>
+            <a:ext cx="950976" cy="182880"/>
+          </a:xfrm>
+          <a:prstGeom prst="rect">
+            <a:avLst/>
+          </a:prstGeom>
+          <a:noFill/>
+        </p:spPr>
+        <p:txBody>
+          <a:bodyPr wrap="square" lIns="0" tIns="0" rIns="0" bIns="0" anchor="t">
+            <a:noAutofit/>
+          </a:bodyPr>
+          <a:lstStyle/>
+          <a:p>
+            <a:pPr algn="ctr">
+              <a:spcAft>
+                <a:spcPts val="200"/>
+              </a:spcAft>
+            </a:pPr>
+            <a:r>
+              <a:rPr sz="750" b="1" i="0">
+                <a:solidFill>
+                  <a:srgbClr val="202124"/>
+                </a:solidFill>
+                <a:latin typeface="Google Sans Flex"/>
+                <a:ea typeface="Google Sans Flex"/>
+                <a:cs typeface="Google Sans Flex"/>
+              </a:rPr>
+              <a:t>Janitha Prathapa</a:t>
+            </a:r>
+          </a:p>
+        </p:txBody>
+      </p:sp>
+      <p:pic>
+        <p:nvPicPr>
+          <p:cNvPr id="63" name="Picture 64" descr="s02_66.png"/>
+          <p:cNvPicPr>
+            <a:picLocks noChangeAspect="1"/>
+          </p:cNvPicPr>
+          <p:nvPr/>
+        </p:nvPicPr>
+        <p:blipFill>
+          <a:blip r:embed="rId7"/>
+          <a:stretch>
+            <a:fillRect/>
+          </a:stretch>
+        </p:blipFill>
+        <p:spPr>
+          <a:xfrm>
+            <a:off x="8065008" y="3566160"/>
+            <a:ext cx="658368" cy="658368"/>
+          </a:xfrm>
+          <a:prstGeom prst="rect">
+            <a:avLst/>
+          </a:prstGeom>
+        </p:spPr>
+      </p:pic>
+      <p:sp>
+        <p:nvSpPr>
+          <p:cNvPr id="64" name="TextBox 65"/>
+          <p:cNvSpPr txBox="1"/>
+          <p:nvPr/>
+        </p:nvSpPr>
+        <p:spPr>
+          <a:xfrm>
+            <a:off x="7900416" y="4261104"/>
+            <a:ext cx="950976" cy="182880"/>
+          </a:xfrm>
+          <a:prstGeom prst="rect">
+            <a:avLst/>
+          </a:prstGeom>
+          <a:noFill/>
+        </p:spPr>
+        <p:txBody>
+          <a:bodyPr wrap="square" lIns="0" tIns="0" rIns="0" bIns="0" anchor="t">
+            <a:noAutofit/>
+          </a:bodyPr>
+          <a:lstStyle/>
+          <a:p>
+            <a:pPr algn="ctr">
+              <a:spcAft>
+                <a:spcPts val="200"/>
+              </a:spcAft>
+            </a:pPr>
+            <a:r>
+              <a:rPr sz="750" b="1" i="0">
+                <a:solidFill>
+                  <a:srgbClr val="202124"/>
+                </a:solidFill>
+                <a:latin typeface="Google Sans Flex"/>
+                <a:ea typeface="Google Sans Flex"/>
+                <a:cs typeface="Google Sans Flex"/>
+              </a:rPr>
+              <a:t>Dinal Fernando</a:t>
+            </a:r>
+          </a:p>
+        </p:txBody>
+      </p:sp>
     </p:spTree>
   </p:cSld>
   <p:clrMapOvr>

--- a/docs/pitch-deck/Property_Inspection_AI_Submission_Xcore.pptx
+++ b/docs/pitch-deck/Property_Inspection_AI_Submission_Xcore.pptx
@@ -10862,7 +10862,7 @@
                 <a:ea typeface="Google Sans Flex"/>
                 <a:cs typeface="Google Sans Flex"/>
               </a:rPr>
-              <a:t>Roadmap: documents, policies and predictive portfolio risk</a:t>
+              <a:t>Roadmap: an inspection agent with spatial reasoning, then portfolio risk</a:t>
             </a:r>
           </a:p>
         </p:txBody>
@@ -11256,7 +11256,7 @@
                 <a:ea typeface="Google Sans Flex"/>
                 <a:cs typeface="Google Sans Flex"/>
               </a:rPr>
-              <a:t>Mobile guided capture with live coverage</a:t>
+              <a:t>Inspection agent: Gemini + Agent Platform (ADK)</a:t>
             </a:r>
           </a:p>
           <a:p>
@@ -11279,7 +11279,7 @@
                 <a:ea typeface="Google Sans Flex"/>
                 <a:cs typeface="Google Sans Flex"/>
               </a:rPr>
-              <a:t>Document AI: deeds, valuations, invoices</a:t>
+              <a:t>Live capture guidance: what to film next</a:t>
             </a:r>
           </a:p>
           <a:p>
@@ -11302,7 +11302,7 @@
                 <a:ea typeface="Google Sans Flex"/>
                 <a:cs typeface="Google Sans Flex"/>
               </a:rPr>
-              <a:t>Vertex AI Search over policy wording</a:t>
+              <a:t>Spatial reasoning over the 3D model</a:t>
             </a:r>
           </a:p>
           <a:p>
@@ -11325,7 +11325,7 @@
                 <a:ea typeface="Google Sans Flex"/>
                 <a:cs typeface="Google Sans Flex"/>
               </a:rPr>
-              <a:t>Commercial localiser (Gemini / Vertex-tuned)</a:t>
+              <a:t>Answers for lender, insurer, surveyor, owner</a:t>
             </a:r>
           </a:p>
         </p:txBody>
@@ -11540,7 +11540,7 @@
                 <a:ea typeface="Google Sans Flex"/>
                 <a:cs typeface="Google Sans Flex"/>
               </a:rPr>
-              <a:t>Multilingual reports (Gemini)</a:t>
+              <a:t>Document AI + Vertex AI Search: deeds, policies</a:t>
             </a:r>
           </a:p>
           <a:p>
@@ -11563,7 +11563,7 @@
                 <a:ea typeface="Google Sans Flex"/>
                 <a:cs typeface="Google Sans Flex"/>
               </a:rPr>
-              <a:t>AlloyDB multi-tenant case management</a:t>
+              <a:t>Agent hand-offs to core systems, human approval</a:t>
             </a:r>
           </a:p>
         </p:txBody>

--- a/docs/pitch-deck/Property_Inspection_AI_Submission_Xcore.pptx
+++ b/docs/pitch-deck/Property_Inspection_AI_Submission_Xcore.pptx
@@ -14938,6 +14938,7 @@
                 <a:latin typeface="Google Sans Flex"/>
                 <a:ea typeface="Google Sans Flex"/>
                 <a:cs typeface="Google Sans Flex"/>
+                <a:hlinkClick r:id="rId5"/>
               </a:rPr>
               <a:t>github.com/XCore-Lab/property-inspection-ai</a:t>
             </a:r>
@@ -14972,13 +14973,14 @@
             <a:r>
               <a:rPr sz="1300" b="1" i="0">
                 <a:solidFill>
-                  <a:srgbClr val="D93025"/>
-                </a:solidFill>
-                <a:latin typeface="Google Sans Flex"/>
-                <a:ea typeface="Google Sans Flex"/>
-                <a:cs typeface="Google Sans Flex"/>
-              </a:rPr>
-              <a:t>[paste link here]</a:t>
+                  <a:srgbClr val="1A73E8"/>
+                </a:solidFill>
+                <a:latin typeface="Google Sans Flex"/>
+                <a:ea typeface="Google Sans Flex"/>
+                <a:cs typeface="Google Sans Flex"/>
+                <a:hlinkClick r:id="rId6"/>
+              </a:rPr>
+              <a:t>drive.google.com/file/d/1C8Ysukjfhx-oKpXUv56eheGLf7wP9lb9/view</a:t>
             </a:r>
             <a:endParaRPr>
               <a:latin typeface="Google Sans Flex Medium"/>
@@ -15016,6 +15018,7 @@
                 <a:latin typeface="Google Sans Flex"/>
                 <a:ea typeface="Google Sans Flex"/>
                 <a:cs typeface="Google Sans Flex"/>
+                <a:hlinkClick r:id="rId7"/>
               </a:rPr>
               <a:t>property-inspection-ai-77055350047.us-central1.run.app</a:t>
             </a:r>
@@ -15054,7 +15057,7 @@
           <p:nvPr/>
         </p:nvPicPr>
         <p:blipFill>
-          <a:blip r:embed="rId5"/>
+          <a:blip r:embed="rId8"/>
           <a:stretch>
             <a:fillRect/>
           </a:stretch>
